--- a/docs/songs_2026-03-17.pptx
+++ b/docs/songs_2026-03-17.pptx
@@ -5,7 +5,7 @@
     <p:sldMasterId id="2147483648" r:id="rId1"/>
   </p:sldMasterIdLst>
   <p:notesMasterIdLst>
-    <p:notesMasterId r:id="rId32"/>
+    <p:notesMasterId r:id="rId33"/>
   </p:notesMasterIdLst>
   <p:sldIdLst>
     <p:sldId id="518" r:id="rId2"/>
@@ -25,19 +25,20 @@
     <p:sldId id="714" r:id="rId16"/>
     <p:sldId id="715" r:id="rId17"/>
     <p:sldId id="716" r:id="rId18"/>
-    <p:sldId id="722" r:id="rId19"/>
-    <p:sldId id="723" r:id="rId20"/>
-    <p:sldId id="724" r:id="rId21"/>
-    <p:sldId id="526" r:id="rId22"/>
-    <p:sldId id="527" r:id="rId23"/>
-    <p:sldId id="725" r:id="rId24"/>
-    <p:sldId id="528" r:id="rId25"/>
-    <p:sldId id="726" r:id="rId26"/>
-    <p:sldId id="529" r:id="rId27"/>
-    <p:sldId id="727" r:id="rId28"/>
-    <p:sldId id="728" r:id="rId29"/>
-    <p:sldId id="729" r:id="rId30"/>
-    <p:sldId id="730" r:id="rId31"/>
+    <p:sldId id="731" r:id="rId19"/>
+    <p:sldId id="722" r:id="rId20"/>
+    <p:sldId id="723" r:id="rId21"/>
+    <p:sldId id="724" r:id="rId22"/>
+    <p:sldId id="526" r:id="rId23"/>
+    <p:sldId id="527" r:id="rId24"/>
+    <p:sldId id="725" r:id="rId25"/>
+    <p:sldId id="528" r:id="rId26"/>
+    <p:sldId id="726" r:id="rId27"/>
+    <p:sldId id="529" r:id="rId28"/>
+    <p:sldId id="727" r:id="rId29"/>
+    <p:sldId id="728" r:id="rId30"/>
+    <p:sldId id="729" r:id="rId31"/>
+    <p:sldId id="730" r:id="rId32"/>
   </p:sldIdLst>
   <p:sldSz cx="9144000" cy="6858000" type="screen4x3"/>
   <p:notesSz cx="6858000" cy="9144000"/>
@@ -158,6 +159,7 @@
             <p14:sldId id="714"/>
             <p14:sldId id="715"/>
             <p14:sldId id="716"/>
+            <p14:sldId id="731"/>
             <p14:sldId id="722"/>
             <p14:sldId id="723"/>
             <p14:sldId id="724"/>
@@ -275,7 +277,7 @@
           <a:p>
             <a:fld id="{C57EAEFC-A9C7-464E-BE3F-33D4DD72E122}" type="datetimeFigureOut">
               <a:rPr lang="en-GB" smtClean="0"/>
-              <a:t>06/03/2026</a:t>
+              <a:t>15/03/2026</a:t>
             </a:fld>
             <a:endParaRPr lang="en-GB"/>
           </a:p>
@@ -728,7 +730,7 @@
             <a:fld id="{26EA1CF3-4A15-4CBF-9A5A-6A56C368BE71}" type="datetimeFigureOut">
               <a:rPr lang="en-GB" smtClean="0"/>
               <a:pPr/>
-              <a:t>06/03/2026</a:t>
+              <a:t>15/03/2026</a:t>
             </a:fld>
             <a:endParaRPr lang="en-GB"/>
           </a:p>
@@ -893,7 +895,7 @@
             <a:fld id="{26EA1CF3-4A15-4CBF-9A5A-6A56C368BE71}" type="datetimeFigureOut">
               <a:rPr lang="en-GB" smtClean="0"/>
               <a:pPr/>
-              <a:t>06/03/2026</a:t>
+              <a:t>15/03/2026</a:t>
             </a:fld>
             <a:endParaRPr lang="en-GB"/>
           </a:p>
@@ -1068,7 +1070,7 @@
             <a:fld id="{26EA1CF3-4A15-4CBF-9A5A-6A56C368BE71}" type="datetimeFigureOut">
               <a:rPr lang="en-GB" smtClean="0"/>
               <a:pPr/>
-              <a:t>06/03/2026</a:t>
+              <a:t>15/03/2026</a:t>
             </a:fld>
             <a:endParaRPr lang="en-GB"/>
           </a:p>
@@ -1235,7 +1237,7 @@
             <a:fld id="{26EA1CF3-4A15-4CBF-9A5A-6A56C368BE71}" type="datetimeFigureOut">
               <a:rPr lang="en-GB" smtClean="0"/>
               <a:pPr/>
-              <a:t>06/03/2026</a:t>
+              <a:t>15/03/2026</a:t>
             </a:fld>
             <a:endParaRPr lang="en-GB"/>
           </a:p>
@@ -1477,7 +1479,7 @@
             <a:fld id="{26EA1CF3-4A15-4CBF-9A5A-6A56C368BE71}" type="datetimeFigureOut">
               <a:rPr lang="en-GB" smtClean="0"/>
               <a:pPr/>
-              <a:t>06/03/2026</a:t>
+              <a:t>15/03/2026</a:t>
             </a:fld>
             <a:endParaRPr lang="en-GB"/>
           </a:p>
@@ -1759,7 +1761,7 @@
             <a:fld id="{26EA1CF3-4A15-4CBF-9A5A-6A56C368BE71}" type="datetimeFigureOut">
               <a:rPr lang="en-GB" smtClean="0"/>
               <a:pPr/>
-              <a:t>06/03/2026</a:t>
+              <a:t>15/03/2026</a:t>
             </a:fld>
             <a:endParaRPr lang="en-GB"/>
           </a:p>
@@ -2175,7 +2177,7 @@
             <a:fld id="{26EA1CF3-4A15-4CBF-9A5A-6A56C368BE71}" type="datetimeFigureOut">
               <a:rPr lang="en-GB" smtClean="0"/>
               <a:pPr/>
-              <a:t>06/03/2026</a:t>
+              <a:t>15/03/2026</a:t>
             </a:fld>
             <a:endParaRPr lang="en-GB"/>
           </a:p>
@@ -2289,7 +2291,7 @@
             <a:fld id="{26EA1CF3-4A15-4CBF-9A5A-6A56C368BE71}" type="datetimeFigureOut">
               <a:rPr lang="en-GB" smtClean="0"/>
               <a:pPr/>
-              <a:t>06/03/2026</a:t>
+              <a:t>15/03/2026</a:t>
             </a:fld>
             <a:endParaRPr lang="en-GB"/>
           </a:p>
@@ -2381,7 +2383,7 @@
             <a:fld id="{26EA1CF3-4A15-4CBF-9A5A-6A56C368BE71}" type="datetimeFigureOut">
               <a:rPr lang="en-GB" smtClean="0"/>
               <a:pPr/>
-              <a:t>06/03/2026</a:t>
+              <a:t>15/03/2026</a:t>
             </a:fld>
             <a:endParaRPr lang="en-GB"/>
           </a:p>
@@ -2653,7 +2655,7 @@
             <a:fld id="{26EA1CF3-4A15-4CBF-9A5A-6A56C368BE71}" type="datetimeFigureOut">
               <a:rPr lang="en-GB" smtClean="0"/>
               <a:pPr/>
-              <a:t>06/03/2026</a:t>
+              <a:t>15/03/2026</a:t>
             </a:fld>
             <a:endParaRPr lang="en-GB"/>
           </a:p>
@@ -2905,7 +2907,7 @@
             <a:fld id="{26EA1CF3-4A15-4CBF-9A5A-6A56C368BE71}" type="datetimeFigureOut">
               <a:rPr lang="en-GB" smtClean="0"/>
               <a:pPr/>
-              <a:t>06/03/2026</a:t>
+              <a:t>15/03/2026</a:t>
             </a:fld>
             <a:endParaRPr lang="en-GB"/>
           </a:p>
@@ -3114,7 +3116,7 @@
             <a:fld id="{26EA1CF3-4A15-4CBF-9A5A-6A56C368BE71}" type="datetimeFigureOut">
               <a:rPr lang="en-GB" smtClean="0"/>
               <a:pPr/>
-              <a:t>06/03/2026</a:t>
+              <a:t>15/03/2026</a:t>
             </a:fld>
             <a:endParaRPr lang="en-GB"/>
           </a:p>
@@ -5169,8 +5171,16 @@
 </file>
 
 <file path=ppt/slides/slide18.xml><?xml version="1.0" encoding="utf-8"?>
-<p:sld xmlns:a="http://schemas.openxmlformats.org/drawingml/2006/main" xmlns:r="http://schemas.openxmlformats.org/officeDocument/2006/relationships" xmlns:p="http://schemas.openxmlformats.org/presentationml/2006/main">
+<p:sld xmlns:a="http://schemas.openxmlformats.org/drawingml/2006/main" xmlns:r="http://schemas.openxmlformats.org/officeDocument/2006/relationships" xmlns:p="http://schemas.openxmlformats.org/presentationml/2006/main" showMasterSp="0">
   <p:cSld>
+    <p:bg>
+      <p:bgPr>
+        <a:solidFill>
+          <a:schemeClr val="tx1"/>
+        </a:solidFill>
+        <a:effectLst/>
+      </p:bgPr>
+    </p:bg>
     <p:spTree>
       <p:nvGrpSpPr>
         <p:cNvPr id="1" name=""/>
@@ -5185,132 +5195,40 @@
           <a:chExt cx="0" cy="0"/>
         </a:xfrm>
       </p:grpSpPr>
-      <p:sp>
-        <p:nvSpPr>
-          <p:cNvPr id="3" name="Subtitle 2"/>
-          <p:cNvSpPr>
-            <a:spLocks noGrp="1"/>
-          </p:cNvSpPr>
-          <p:nvPr>
-            <p:ph type="subTitle" idx="1"/>
-          </p:nvPr>
-        </p:nvSpPr>
+      <p:pic>
+        <p:nvPicPr>
+          <p:cNvPr id="7" name="Picture 6">
+            <a:extLst>
+              <a:ext uri="{FF2B5EF4-FFF2-40B4-BE49-F238E27FC236}">
+                <a16:creationId xmlns:a16="http://schemas.microsoft.com/office/drawing/2014/main" id="{00C06FB2-2D54-FBEF-CA5E-3D62239A9B2E}"/>
+              </a:ext>
+            </a:extLst>
+          </p:cNvPr>
+          <p:cNvPicPr>
+            <a:picLocks noChangeAspect="1"/>
+          </p:cNvPicPr>
+          <p:nvPr/>
+        </p:nvPicPr>
+        <p:blipFill>
+          <a:blip r:embed="rId2"/>
+          <a:stretch>
+            <a:fillRect/>
+          </a:stretch>
+        </p:blipFill>
         <p:spPr>
           <a:xfrm>
-            <a:off x="323528" y="188640"/>
-            <a:ext cx="8640960" cy="6480720"/>
+            <a:off x="2187203" y="0"/>
+            <a:ext cx="4769593" cy="6858000"/>
           </a:xfrm>
+          <a:prstGeom prst="rect">
+            <a:avLst/>
+          </a:prstGeom>
         </p:spPr>
-        <p:txBody>
-          <a:bodyPr>
-            <a:noAutofit/>
-          </a:bodyPr>
-          <a:lstStyle/>
-          <a:p>
-            <a:endParaRPr lang="en-GB" sz="5400" dirty="0">
-              <a:solidFill>
-                <a:schemeClr val="bg1"/>
-              </a:solidFill>
-            </a:endParaRPr>
-          </a:p>
-          <a:p>
-            <a:r>
-              <a:rPr lang="en-GB" sz="4400" b="0" i="0" dirty="0">
-                <a:solidFill>
-                  <a:srgbClr val="00A3E0"/>
-                </a:solidFill>
-                <a:effectLst/>
-                <a:latin typeface="akagi_probook"/>
-              </a:rPr>
-              <a:t>The Blessing</a:t>
-            </a:r>
-          </a:p>
-          <a:p>
-            <a:br>
-              <a:rPr lang="en-GB" sz="1200" dirty="0">
-                <a:solidFill>
-                  <a:schemeClr val="bg1"/>
-                </a:solidFill>
-              </a:rPr>
-            </a:br>
-            <a:br>
-              <a:rPr lang="en-GB" sz="1200" dirty="0">
-                <a:solidFill>
-                  <a:schemeClr val="bg1"/>
-                </a:solidFill>
-              </a:rPr>
-            </a:br>
-            <a:r>
-              <a:rPr lang="en-GB" sz="1200" dirty="0">
-                <a:solidFill>
-                  <a:schemeClr val="bg1"/>
-                </a:solidFill>
-              </a:rPr>
-              <a:t>CCLI Song # 7147007</a:t>
-            </a:r>
-          </a:p>
-          <a:p>
-            <a:r>
-              <a:rPr lang="en-GB" sz="1200" dirty="0">
-                <a:solidFill>
-                  <a:schemeClr val="bg1"/>
-                </a:solidFill>
-              </a:rPr>
-              <a:t>Chris Brown | Cody Carnes | Kari Jobe | Steven Furtick</a:t>
-            </a:r>
-          </a:p>
-          <a:p>
-            <a:r>
-              <a:rPr lang="en-GB" sz="1200" dirty="0">
-                <a:solidFill>
-                  <a:schemeClr val="bg1"/>
-                </a:solidFill>
-              </a:rPr>
-              <a:t>© 2020 Capitol CMG Paragon; Kari Jobe Carnes Music; Worship Together Music; Writer's Roof Publishing; Music by Elevation Worship Publishing</a:t>
-            </a:r>
-          </a:p>
-          <a:p>
-            <a:r>
-              <a:rPr lang="en-GB" sz="1200" dirty="0">
-                <a:solidFill>
-                  <a:schemeClr val="bg1"/>
-                </a:solidFill>
-              </a:rPr>
-              <a:t>For use solely with the </a:t>
-            </a:r>
-            <a:r>
-              <a:rPr lang="en-GB" sz="1200" dirty="0" err="1">
-                <a:solidFill>
-                  <a:schemeClr val="bg1"/>
-                </a:solidFill>
-              </a:rPr>
-              <a:t>SongSelect</a:t>
-            </a:r>
-            <a:r>
-              <a:rPr lang="en-GB" sz="1200" dirty="0">
-                <a:solidFill>
-                  <a:schemeClr val="bg1"/>
-                </a:solidFill>
-              </a:rPr>
-              <a:t>® Terms of Use. All rights reserved. www.ccli.com</a:t>
-            </a:r>
-          </a:p>
-          <a:p>
-            <a:r>
-              <a:rPr lang="en-GB" sz="1200" dirty="0">
-                <a:solidFill>
-                  <a:schemeClr val="bg1"/>
-                </a:solidFill>
-              </a:rPr>
-              <a:t>CCLI Licence No. 33265</a:t>
-            </a:r>
-          </a:p>
-        </p:txBody>
-      </p:sp>
+      </p:pic>
     </p:spTree>
     <p:extLst>
       <p:ext uri="{BB962C8B-B14F-4D97-AF65-F5344CB8AC3E}">
-        <p14:creationId xmlns:p14="http://schemas.microsoft.com/office/powerpoint/2010/main" val="2310732815"/>
+        <p14:creationId xmlns:p14="http://schemas.microsoft.com/office/powerpoint/2010/main" val="2522196368"/>
       </p:ext>
     </p:extLst>
   </p:cSld>
@@ -5349,7 +5267,7 @@
         </p:nvSpPr>
         <p:spPr>
           <a:xfrm>
-            <a:off x="251520" y="836712"/>
+            <a:off x="323528" y="188640"/>
             <a:ext cx="8640960" cy="6480720"/>
           </a:xfrm>
         </p:spPr>
@@ -5359,106 +5277,102 @@
           </a:bodyPr>
           <a:lstStyle/>
           <a:p>
-            <a:r>
-              <a:rPr lang="en-GB" sz="3600" dirty="0">
-                <a:solidFill>
-                  <a:schemeClr val="bg1"/>
-                </a:solidFill>
-              </a:rPr>
-              <a:t>The Lord bless you</a:t>
-            </a:r>
-          </a:p>
-          <a:p>
-            <a:r>
-              <a:rPr lang="en-GB" sz="3600" dirty="0">
-                <a:solidFill>
-                  <a:schemeClr val="bg1"/>
-                </a:solidFill>
-              </a:rPr>
-              <a:t>And keep you</a:t>
-            </a:r>
-          </a:p>
-          <a:p>
-            <a:r>
-              <a:rPr lang="en-GB" sz="3600" dirty="0">
-                <a:solidFill>
-                  <a:schemeClr val="bg1"/>
-                </a:solidFill>
-              </a:rPr>
-              <a:t>Make His face shine upon you</a:t>
-            </a:r>
-          </a:p>
-          <a:p>
-            <a:r>
-              <a:rPr lang="en-GB" sz="3600" dirty="0">
-                <a:solidFill>
-                  <a:schemeClr val="bg1"/>
-                </a:solidFill>
-              </a:rPr>
-              <a:t>And be gracious to you</a:t>
-            </a:r>
-          </a:p>
-          <a:p>
-            <a:r>
-              <a:rPr lang="en-GB" sz="3600" dirty="0">
-                <a:solidFill>
-                  <a:schemeClr val="bg1"/>
-                </a:solidFill>
-              </a:rPr>
-              <a:t>The Lord turn His</a:t>
-            </a:r>
-          </a:p>
-          <a:p>
-            <a:r>
-              <a:rPr lang="en-GB" sz="3600" dirty="0">
-                <a:solidFill>
-                  <a:schemeClr val="bg1"/>
-                </a:solidFill>
-              </a:rPr>
-              <a:t>Face toward you</a:t>
-            </a:r>
-          </a:p>
-          <a:p>
-            <a:r>
-              <a:rPr lang="en-GB" sz="3600" dirty="0">
-                <a:solidFill>
-                  <a:schemeClr val="bg1"/>
-                </a:solidFill>
-              </a:rPr>
-              <a:t>And give you peace</a:t>
-            </a:r>
-          </a:p>
-        </p:txBody>
-      </p:sp>
-      <p:sp>
-        <p:nvSpPr>
-          <p:cNvPr id="4" name="TextBox 3"/>
-          <p:cNvSpPr txBox="1"/>
-          <p:nvPr/>
-        </p:nvSpPr>
-        <p:spPr>
-          <a:xfrm>
-            <a:off x="8529729" y="0"/>
-            <a:ext cx="628698" cy="461665"/>
-          </a:xfrm>
-          <a:prstGeom prst="rect">
-            <a:avLst/>
-          </a:prstGeom>
-          <a:noFill/>
-        </p:spPr>
-        <p:txBody>
-          <a:bodyPr wrap="none" rtlCol="0">
-            <a:spAutoFit/>
-          </a:bodyPr>
-          <a:lstStyle/>
-          <a:p>
-            <a:r>
-              <a:rPr lang="en-GB" sz="2400" b="1" dirty="0">
-                <a:solidFill>
-                  <a:schemeClr val="bg1"/>
-                </a:solidFill>
-              </a:rPr>
-              <a:t>1/8</a:t>
+            <a:endParaRPr lang="en-GB" sz="5400" dirty="0">
+              <a:solidFill>
+                <a:schemeClr val="bg1"/>
+              </a:solidFill>
+            </a:endParaRPr>
+          </a:p>
+          <a:p>
+            <a:r>
+              <a:rPr lang="en-GB" sz="4400" b="0" i="0" dirty="0">
+                <a:solidFill>
+                  <a:srgbClr val="00A3E0"/>
+                </a:solidFill>
+                <a:effectLst/>
+                <a:latin typeface="akagi_probook"/>
+              </a:rPr>
+              <a:t>The Blessing</a:t>
+            </a:r>
+          </a:p>
+          <a:p>
+            <a:br>
+              <a:rPr lang="en-GB" sz="1200" dirty="0">
+                <a:solidFill>
+                  <a:schemeClr val="bg1"/>
+                </a:solidFill>
+              </a:rPr>
+            </a:br>
+            <a:br>
+              <a:rPr lang="en-GB" sz="1200" dirty="0">
+                <a:solidFill>
+                  <a:schemeClr val="bg1"/>
+                </a:solidFill>
+              </a:rPr>
+            </a:br>
+            <a:r>
+              <a:rPr lang="en-GB" sz="1200" dirty="0">
+                <a:solidFill>
+                  <a:schemeClr val="bg1"/>
+                </a:solidFill>
+              </a:rPr>
+              <a:t>CCLI Song # 7147007</a:t>
+            </a:r>
+          </a:p>
+          <a:p>
+            <a:r>
+              <a:rPr lang="en-GB" sz="1200" dirty="0">
+                <a:solidFill>
+                  <a:schemeClr val="bg1"/>
+                </a:solidFill>
+              </a:rPr>
+              <a:t>Chris Brown | Cody Carnes | Kari Jobe | Steven Furtick</a:t>
+            </a:r>
+          </a:p>
+          <a:p>
+            <a:r>
+              <a:rPr lang="en-GB" sz="1200" dirty="0">
+                <a:solidFill>
+                  <a:schemeClr val="bg1"/>
+                </a:solidFill>
+              </a:rPr>
+              <a:t>© 2020 Capitol CMG Paragon; Kari Jobe Carnes Music; Worship Together Music; Writer's Roof Publishing; Music by Elevation Worship Publishing</a:t>
+            </a:r>
+          </a:p>
+          <a:p>
+            <a:r>
+              <a:rPr lang="en-GB" sz="1200" dirty="0">
+                <a:solidFill>
+                  <a:schemeClr val="bg1"/>
+                </a:solidFill>
+              </a:rPr>
+              <a:t>For use solely with the </a:t>
+            </a:r>
+            <a:r>
+              <a:rPr lang="en-GB" sz="1200" dirty="0" err="1">
+                <a:solidFill>
+                  <a:schemeClr val="bg1"/>
+                </a:solidFill>
+              </a:rPr>
+              <a:t>SongSelect</a:t>
+            </a:r>
+            <a:r>
+              <a:rPr lang="en-GB" sz="1200" dirty="0">
+                <a:solidFill>
+                  <a:schemeClr val="bg1"/>
+                </a:solidFill>
+              </a:rPr>
+              <a:t>® Terms of Use. All rights reserved. www.ccli.com</a:t>
+            </a:r>
+          </a:p>
+          <a:p>
+            <a:r>
+              <a:rPr lang="en-GB" sz="1200" dirty="0">
+                <a:solidFill>
+                  <a:schemeClr val="bg1"/>
+                </a:solidFill>
+              </a:rPr>
+              <a:t>CCLI Licence No. 33265</a:t>
             </a:r>
           </a:p>
         </p:txBody>
@@ -5466,7 +5380,7 @@
     </p:spTree>
     <p:extLst>
       <p:ext uri="{BB962C8B-B14F-4D97-AF65-F5344CB8AC3E}">
-        <p14:creationId xmlns:p14="http://schemas.microsoft.com/office/powerpoint/2010/main" val="674371725"/>
+        <p14:creationId xmlns:p14="http://schemas.microsoft.com/office/powerpoint/2010/main" val="2310732815"/>
       </p:ext>
     </p:extLst>
   </p:cSld>
@@ -5631,6 +5545,162 @@
         </p:nvSpPr>
         <p:spPr>
           <a:xfrm>
+            <a:off x="251520" y="836712"/>
+            <a:ext cx="8640960" cy="6480720"/>
+          </a:xfrm>
+        </p:spPr>
+        <p:txBody>
+          <a:bodyPr>
+            <a:noAutofit/>
+          </a:bodyPr>
+          <a:lstStyle/>
+          <a:p>
+            <a:r>
+              <a:rPr lang="en-GB" sz="3600" dirty="0">
+                <a:solidFill>
+                  <a:schemeClr val="bg1"/>
+                </a:solidFill>
+              </a:rPr>
+              <a:t>The Lord bless you</a:t>
+            </a:r>
+          </a:p>
+          <a:p>
+            <a:r>
+              <a:rPr lang="en-GB" sz="3600" dirty="0">
+                <a:solidFill>
+                  <a:schemeClr val="bg1"/>
+                </a:solidFill>
+              </a:rPr>
+              <a:t>And keep you</a:t>
+            </a:r>
+          </a:p>
+          <a:p>
+            <a:r>
+              <a:rPr lang="en-GB" sz="3600" dirty="0">
+                <a:solidFill>
+                  <a:schemeClr val="bg1"/>
+                </a:solidFill>
+              </a:rPr>
+              <a:t>Make His face shine upon you</a:t>
+            </a:r>
+          </a:p>
+          <a:p>
+            <a:r>
+              <a:rPr lang="en-GB" sz="3600" dirty="0">
+                <a:solidFill>
+                  <a:schemeClr val="bg1"/>
+                </a:solidFill>
+              </a:rPr>
+              <a:t>And be gracious to you</a:t>
+            </a:r>
+          </a:p>
+          <a:p>
+            <a:r>
+              <a:rPr lang="en-GB" sz="3600" dirty="0">
+                <a:solidFill>
+                  <a:schemeClr val="bg1"/>
+                </a:solidFill>
+              </a:rPr>
+              <a:t>The Lord turn His</a:t>
+            </a:r>
+          </a:p>
+          <a:p>
+            <a:r>
+              <a:rPr lang="en-GB" sz="3600" dirty="0">
+                <a:solidFill>
+                  <a:schemeClr val="bg1"/>
+                </a:solidFill>
+              </a:rPr>
+              <a:t>Face toward you</a:t>
+            </a:r>
+          </a:p>
+          <a:p>
+            <a:r>
+              <a:rPr lang="en-GB" sz="3600" dirty="0">
+                <a:solidFill>
+                  <a:schemeClr val="bg1"/>
+                </a:solidFill>
+              </a:rPr>
+              <a:t>And give you peace</a:t>
+            </a:r>
+          </a:p>
+        </p:txBody>
+      </p:sp>
+      <p:sp>
+        <p:nvSpPr>
+          <p:cNvPr id="4" name="TextBox 3"/>
+          <p:cNvSpPr txBox="1"/>
+          <p:nvPr/>
+        </p:nvSpPr>
+        <p:spPr>
+          <a:xfrm>
+            <a:off x="8529729" y="0"/>
+            <a:ext cx="628698" cy="461665"/>
+          </a:xfrm>
+          <a:prstGeom prst="rect">
+            <a:avLst/>
+          </a:prstGeom>
+          <a:noFill/>
+        </p:spPr>
+        <p:txBody>
+          <a:bodyPr wrap="none" rtlCol="0">
+            <a:spAutoFit/>
+          </a:bodyPr>
+          <a:lstStyle/>
+          <a:p>
+            <a:r>
+              <a:rPr lang="en-GB" sz="2400" b="1" dirty="0">
+                <a:solidFill>
+                  <a:schemeClr val="bg1"/>
+                </a:solidFill>
+              </a:rPr>
+              <a:t>1/8</a:t>
+            </a:r>
+          </a:p>
+        </p:txBody>
+      </p:sp>
+    </p:spTree>
+    <p:extLst>
+      <p:ext uri="{BB962C8B-B14F-4D97-AF65-F5344CB8AC3E}">
+        <p14:creationId xmlns:p14="http://schemas.microsoft.com/office/powerpoint/2010/main" val="674371725"/>
+      </p:ext>
+    </p:extLst>
+  </p:cSld>
+  <p:clrMapOvr>
+    <a:masterClrMapping/>
+  </p:clrMapOvr>
+</p:sld>
+</file>
+
+<file path=ppt/slides/slide21.xml><?xml version="1.0" encoding="utf-8"?>
+<p:sld xmlns:a="http://schemas.openxmlformats.org/drawingml/2006/main" xmlns:r="http://schemas.openxmlformats.org/officeDocument/2006/relationships" xmlns:p="http://schemas.openxmlformats.org/presentationml/2006/main">
+  <p:cSld>
+    <p:spTree>
+      <p:nvGrpSpPr>
+        <p:cNvPr id="1" name=""/>
+        <p:cNvGrpSpPr/>
+        <p:nvPr/>
+      </p:nvGrpSpPr>
+      <p:grpSpPr>
+        <a:xfrm>
+          <a:off x="0" y="0"/>
+          <a:ext cx="0" cy="0"/>
+          <a:chOff x="0" y="0"/>
+          <a:chExt cx="0" cy="0"/>
+        </a:xfrm>
+      </p:grpSpPr>
+      <p:sp>
+        <p:nvSpPr>
+          <p:cNvPr id="3" name="Subtitle 2"/>
+          <p:cNvSpPr>
+            <a:spLocks noGrp="1"/>
+          </p:cNvSpPr>
+          <p:nvPr>
+            <p:ph type="subTitle" idx="1"/>
+          </p:nvPr>
+        </p:nvSpPr>
+        <p:spPr>
+          <a:xfrm>
             <a:off x="251520" y="764704"/>
             <a:ext cx="8640960" cy="6480720"/>
           </a:xfrm>
@@ -5718,7 +5788,7 @@
 </p:sld>
 </file>
 
-<file path=ppt/slides/slide21.xml><?xml version="1.0" encoding="utf-8"?>
+<file path=ppt/slides/slide22.xml><?xml version="1.0" encoding="utf-8"?>
 <p:sld xmlns:a="http://schemas.openxmlformats.org/drawingml/2006/main" xmlns:r="http://schemas.openxmlformats.org/officeDocument/2006/relationships" xmlns:p="http://schemas.openxmlformats.org/presentationml/2006/main">
   <p:cSld>
     <p:spTree>
@@ -5904,7 +5974,7 @@
 </p:sld>
 </file>
 
-<file path=ppt/slides/slide22.xml><?xml version="1.0" encoding="utf-8"?>
+<file path=ppt/slides/slide23.xml><?xml version="1.0" encoding="utf-8"?>
 <p:sld xmlns:a="http://schemas.openxmlformats.org/drawingml/2006/main" xmlns:r="http://schemas.openxmlformats.org/officeDocument/2006/relationships" xmlns:p="http://schemas.openxmlformats.org/presentationml/2006/main">
   <p:cSld>
     <p:spTree>
@@ -6038,7 +6108,7 @@
 </p:sld>
 </file>
 
-<file path=ppt/slides/slide23.xml><?xml version="1.0" encoding="utf-8"?>
+<file path=ppt/slides/slide24.xml><?xml version="1.0" encoding="utf-8"?>
 <p:sld xmlns:a="http://schemas.openxmlformats.org/drawingml/2006/main" xmlns:r="http://schemas.openxmlformats.org/officeDocument/2006/relationships" xmlns:p="http://schemas.openxmlformats.org/presentationml/2006/main">
   <p:cSld>
     <p:spTree>
@@ -6194,7 +6264,7 @@
 </p:sld>
 </file>
 
-<file path=ppt/slides/slide24.xml><?xml version="1.0" encoding="utf-8"?>
+<file path=ppt/slides/slide25.xml><?xml version="1.0" encoding="utf-8"?>
 <p:sld xmlns:a="http://schemas.openxmlformats.org/drawingml/2006/main" xmlns:r="http://schemas.openxmlformats.org/officeDocument/2006/relationships" xmlns:p="http://schemas.openxmlformats.org/presentationml/2006/main">
   <p:cSld>
     <p:spTree>
@@ -6378,7 +6448,7 @@
 </p:sld>
 </file>
 
-<file path=ppt/slides/slide25.xml><?xml version="1.0" encoding="utf-8"?>
+<file path=ppt/slides/slide26.xml><?xml version="1.0" encoding="utf-8"?>
 <p:sld xmlns:a="http://schemas.openxmlformats.org/drawingml/2006/main" xmlns:r="http://schemas.openxmlformats.org/officeDocument/2006/relationships" xmlns:p="http://schemas.openxmlformats.org/presentationml/2006/main">
   <p:cSld>
     <p:spTree>
@@ -6544,7 +6614,7 @@
 </p:sld>
 </file>
 
-<file path=ppt/slides/slide26.xml><?xml version="1.0" encoding="utf-8"?>
+<file path=ppt/slides/slide27.xml><?xml version="1.0" encoding="utf-8"?>
 <p:sld xmlns:a="http://schemas.openxmlformats.org/drawingml/2006/main" xmlns:r="http://schemas.openxmlformats.org/officeDocument/2006/relationships" xmlns:p="http://schemas.openxmlformats.org/presentationml/2006/main">
   <p:cSld>
     <p:spTree>
@@ -6669,172 +6739,6 @@
     <p:extLst>
       <p:ext uri="{BB962C8B-B14F-4D97-AF65-F5344CB8AC3E}">
         <p14:creationId xmlns:p14="http://schemas.microsoft.com/office/powerpoint/2010/main" val="1849287621"/>
-      </p:ext>
-    </p:extLst>
-  </p:cSld>
-  <p:clrMapOvr>
-    <a:masterClrMapping/>
-  </p:clrMapOvr>
-</p:sld>
-</file>
-
-<file path=ppt/slides/slide27.xml><?xml version="1.0" encoding="utf-8"?>
-<p:sld xmlns:a="http://schemas.openxmlformats.org/drawingml/2006/main" xmlns:r="http://schemas.openxmlformats.org/officeDocument/2006/relationships" xmlns:p="http://schemas.openxmlformats.org/presentationml/2006/main">
-  <p:cSld>
-    <p:spTree>
-      <p:nvGrpSpPr>
-        <p:cNvPr id="1" name=""/>
-        <p:cNvGrpSpPr/>
-        <p:nvPr/>
-      </p:nvGrpSpPr>
-      <p:grpSpPr>
-        <a:xfrm>
-          <a:off x="0" y="0"/>
-          <a:ext cx="0" cy="0"/>
-          <a:chOff x="0" y="0"/>
-          <a:chExt cx="0" cy="0"/>
-        </a:xfrm>
-      </p:grpSpPr>
-      <p:sp>
-        <p:nvSpPr>
-          <p:cNvPr id="3" name="Subtitle 2"/>
-          <p:cNvSpPr>
-            <a:spLocks noGrp="1"/>
-          </p:cNvSpPr>
-          <p:nvPr>
-            <p:ph type="subTitle" idx="1"/>
-          </p:nvPr>
-        </p:nvSpPr>
-        <p:spPr>
-          <a:xfrm>
-            <a:off x="323528" y="188640"/>
-            <a:ext cx="8640960" cy="6480720"/>
-          </a:xfrm>
-        </p:spPr>
-        <p:txBody>
-          <a:bodyPr>
-            <a:noAutofit/>
-          </a:bodyPr>
-          <a:lstStyle/>
-          <a:p>
-            <a:endParaRPr lang="en-GB" sz="5400" dirty="0">
-              <a:solidFill>
-                <a:schemeClr val="bg1"/>
-              </a:solidFill>
-            </a:endParaRPr>
-          </a:p>
-          <a:p>
-            <a:r>
-              <a:rPr lang="en-GB" sz="4400" b="0" i="0" dirty="0">
-                <a:solidFill>
-                  <a:srgbClr val="00A3E0"/>
-                </a:solidFill>
-                <a:effectLst/>
-                <a:latin typeface="akagi_probook"/>
-              </a:rPr>
-              <a:t>Still</a:t>
-            </a:r>
-          </a:p>
-          <a:p>
-            <a:br>
-              <a:rPr lang="en-GB" sz="1200" dirty="0">
-                <a:solidFill>
-                  <a:schemeClr val="bg1"/>
-                </a:solidFill>
-              </a:rPr>
-            </a:br>
-            <a:r>
-              <a:rPr lang="en-GB" sz="1200" dirty="0">
-                <a:solidFill>
-                  <a:schemeClr val="bg1"/>
-                </a:solidFill>
-              </a:rPr>
-              <a:t>CCLI Song # 3940963</a:t>
-            </a:r>
-          </a:p>
-          <a:p>
-            <a:endParaRPr lang="en-GB" sz="1200" dirty="0">
-              <a:solidFill>
-                <a:schemeClr val="bg1"/>
-              </a:solidFill>
-            </a:endParaRPr>
-          </a:p>
-          <a:p>
-            <a:r>
-              <a:rPr lang="en-GB" sz="1200" dirty="0">
-                <a:solidFill>
-                  <a:schemeClr val="bg1"/>
-                </a:solidFill>
-              </a:rPr>
-              <a:t>Reuben Morgan</a:t>
-            </a:r>
-          </a:p>
-          <a:p>
-            <a:endParaRPr lang="en-GB" sz="1200" dirty="0">
-              <a:solidFill>
-                <a:schemeClr val="bg1"/>
-              </a:solidFill>
-            </a:endParaRPr>
-          </a:p>
-          <a:p>
-            <a:r>
-              <a:rPr lang="en-GB" sz="1200" dirty="0">
-                <a:solidFill>
-                  <a:schemeClr val="bg1"/>
-                </a:solidFill>
-              </a:rPr>
-              <a:t>© 2002 Hillsong Music Publishing Australia (Admin. by Hillsong Music Publishing UK)</a:t>
-            </a:r>
-          </a:p>
-          <a:p>
-            <a:r>
-              <a:rPr lang="en-GB" sz="1200" dirty="0">
-                <a:solidFill>
-                  <a:schemeClr val="bg1"/>
-                </a:solidFill>
-              </a:rPr>
-              <a:t>For use solely with the </a:t>
-            </a:r>
-            <a:r>
-              <a:rPr lang="en-GB" sz="1200" dirty="0" err="1">
-                <a:solidFill>
-                  <a:schemeClr val="bg1"/>
-                </a:solidFill>
-              </a:rPr>
-              <a:t>SongSelect</a:t>
-            </a:r>
-            <a:r>
-              <a:rPr lang="en-GB" sz="1200" dirty="0">
-                <a:solidFill>
-                  <a:schemeClr val="bg1"/>
-                </a:solidFill>
-              </a:rPr>
-              <a:t>® Terms of Use. All rights reserved. www.ccli.com</a:t>
-            </a:r>
-          </a:p>
-          <a:p>
-            <a:endParaRPr lang="en-GB" sz="1200" dirty="0">
-              <a:solidFill>
-                <a:schemeClr val="bg1"/>
-              </a:solidFill>
-            </a:endParaRPr>
-          </a:p>
-          <a:p>
-            <a:r>
-              <a:rPr lang="en-GB" sz="1200" dirty="0">
-                <a:solidFill>
-                  <a:schemeClr val="bg1"/>
-                </a:solidFill>
-              </a:rPr>
-              <a:t>CCLI Licence No. 33265</a:t>
-            </a:r>
-          </a:p>
-        </p:txBody>
-      </p:sp>
-    </p:spTree>
-    <p:extLst>
-      <p:ext uri="{BB962C8B-B14F-4D97-AF65-F5344CB8AC3E}">
-        <p14:creationId xmlns:p14="http://schemas.microsoft.com/office/powerpoint/2010/main" val="2472106261"/>
       </p:ext>
     </p:extLst>
   </p:cSld>
@@ -6873,7 +6777,7 @@
         </p:nvSpPr>
         <p:spPr>
           <a:xfrm>
-            <a:off x="0" y="692696"/>
+            <a:off x="323528" y="188640"/>
             <a:ext cx="8640960" cy="6480720"/>
           </a:xfrm>
         </p:spPr>
@@ -6883,76 +6787,116 @@
           </a:bodyPr>
           <a:lstStyle/>
           <a:p>
-            <a:r>
-              <a:rPr lang="en-GB" sz="3600" dirty="0">
-                <a:solidFill>
-                  <a:schemeClr val="bg1"/>
-                </a:solidFill>
-              </a:rPr>
-              <a:t>Hide me now</a:t>
-            </a:r>
-          </a:p>
-          <a:p>
-            <a:r>
-              <a:rPr lang="en-GB" sz="3600" dirty="0">
-                <a:solidFill>
-                  <a:schemeClr val="bg1"/>
-                </a:solidFill>
-              </a:rPr>
-              <a:t>Under Your wings</a:t>
-            </a:r>
-          </a:p>
-          <a:p>
-            <a:r>
-              <a:rPr lang="en-GB" sz="3600" dirty="0">
-                <a:solidFill>
-                  <a:schemeClr val="bg1"/>
-                </a:solidFill>
-              </a:rPr>
-              <a:t>Cover me</a:t>
-            </a:r>
-          </a:p>
-          <a:p>
-            <a:r>
-              <a:rPr lang="en-GB" sz="3600" dirty="0">
-                <a:solidFill>
-                  <a:schemeClr val="bg1"/>
-                </a:solidFill>
-              </a:rPr>
-              <a:t>Within Your mighty hand</a:t>
-            </a:r>
-          </a:p>
-        </p:txBody>
-      </p:sp>
-      <p:sp>
-        <p:nvSpPr>
-          <p:cNvPr id="4" name="TextBox 3"/>
-          <p:cNvSpPr txBox="1"/>
-          <p:nvPr/>
-        </p:nvSpPr>
-        <p:spPr>
-          <a:xfrm>
-            <a:off x="8529729" y="0"/>
-            <a:ext cx="628698" cy="461665"/>
-          </a:xfrm>
-          <a:prstGeom prst="rect">
-            <a:avLst/>
-          </a:prstGeom>
-          <a:noFill/>
-        </p:spPr>
-        <p:txBody>
-          <a:bodyPr wrap="none" rtlCol="0">
-            <a:spAutoFit/>
-          </a:bodyPr>
-          <a:lstStyle/>
-          <a:p>
-            <a:r>
-              <a:rPr lang="en-GB" sz="2400" b="1" dirty="0">
-                <a:solidFill>
-                  <a:schemeClr val="bg1"/>
-                </a:solidFill>
-              </a:rPr>
-              <a:t>1/3</a:t>
+            <a:endParaRPr lang="en-GB" sz="5400" dirty="0">
+              <a:solidFill>
+                <a:schemeClr val="bg1"/>
+              </a:solidFill>
+            </a:endParaRPr>
+          </a:p>
+          <a:p>
+            <a:r>
+              <a:rPr lang="en-GB" sz="4400" b="0" i="0" dirty="0">
+                <a:solidFill>
+                  <a:srgbClr val="00A3E0"/>
+                </a:solidFill>
+                <a:effectLst/>
+                <a:latin typeface="akagi_probook"/>
+              </a:rPr>
+              <a:t>Still</a:t>
+            </a:r>
+          </a:p>
+          <a:p>
+            <a:br>
+              <a:rPr lang="en-GB" sz="1200" dirty="0">
+                <a:solidFill>
+                  <a:schemeClr val="bg1"/>
+                </a:solidFill>
+              </a:rPr>
+            </a:br>
+            <a:r>
+              <a:rPr lang="en-GB" sz="1200" dirty="0">
+                <a:solidFill>
+                  <a:schemeClr val="bg1"/>
+                </a:solidFill>
+              </a:rPr>
+              <a:t>CCLI Song # 3940963</a:t>
+            </a:r>
+          </a:p>
+          <a:p>
+            <a:endParaRPr lang="en-GB" sz="1200" dirty="0">
+              <a:solidFill>
+                <a:schemeClr val="bg1"/>
+              </a:solidFill>
+            </a:endParaRPr>
+          </a:p>
+          <a:p>
+            <a:r>
+              <a:rPr lang="en-GB" sz="1200" dirty="0">
+                <a:solidFill>
+                  <a:schemeClr val="bg1"/>
+                </a:solidFill>
+              </a:rPr>
+              <a:t>Reuben Morgan</a:t>
+            </a:r>
+          </a:p>
+          <a:p>
+            <a:endParaRPr lang="en-GB" sz="1200" dirty="0">
+              <a:solidFill>
+                <a:schemeClr val="bg1"/>
+              </a:solidFill>
+            </a:endParaRPr>
+          </a:p>
+          <a:p>
+            <a:r>
+              <a:rPr lang="en-GB" sz="1200" dirty="0">
+                <a:solidFill>
+                  <a:schemeClr val="bg1"/>
+                </a:solidFill>
+              </a:rPr>
+              <a:t>© 2002 Hillsong Music Publishing Australia (Admin. by Hillsong Music Publishing UK)</a:t>
+            </a:r>
+          </a:p>
+          <a:p>
+            <a:r>
+              <a:rPr lang="en-GB" sz="1200" dirty="0">
+                <a:solidFill>
+                  <a:schemeClr val="bg1"/>
+                </a:solidFill>
+              </a:rPr>
+              <a:t>For use solely with the </a:t>
+            </a:r>
+            <a:r>
+              <a:rPr lang="en-GB" sz="1200" dirty="0" err="1">
+                <a:solidFill>
+                  <a:schemeClr val="bg1"/>
+                </a:solidFill>
+              </a:rPr>
+              <a:t>SongSelect</a:t>
+            </a:r>
+            <a:r>
+              <a:rPr lang="en-GB" sz="1200" dirty="0">
+                <a:solidFill>
+                  <a:schemeClr val="bg1"/>
+                </a:solidFill>
+              </a:rPr>
+              <a:t>® Terms of Use. All rights reserved. www.ccli.com</a:t>
+            </a:r>
+          </a:p>
+          <a:p>
+            <a:endParaRPr lang="en-GB" sz="1200" dirty="0">
+              <a:solidFill>
+                <a:schemeClr val="bg1"/>
+              </a:solidFill>
+            </a:endParaRPr>
+          </a:p>
+          <a:p>
+            <a:r>
+              <a:rPr lang="en-GB" sz="1200" dirty="0">
+                <a:solidFill>
+                  <a:schemeClr val="bg1"/>
+                </a:solidFill>
+              </a:rPr>
+              <a:t>CCLI Licence No. 33265</a:t>
             </a:r>
           </a:p>
         </p:txBody>
@@ -6960,7 +6904,7 @@
     </p:spTree>
     <p:extLst>
       <p:ext uri="{BB962C8B-B14F-4D97-AF65-F5344CB8AC3E}">
-        <p14:creationId xmlns:p14="http://schemas.microsoft.com/office/powerpoint/2010/main" val="3281651247"/>
+        <p14:creationId xmlns:p14="http://schemas.microsoft.com/office/powerpoint/2010/main" val="2472106261"/>
       </p:ext>
     </p:extLst>
   </p:cSld>
@@ -6999,7 +6943,7 @@
         </p:nvSpPr>
         <p:spPr>
           <a:xfrm>
-            <a:off x="203118" y="692696"/>
+            <a:off x="0" y="692696"/>
             <a:ext cx="8640960" cy="6480720"/>
           </a:xfrm>
         </p:spPr>
@@ -7015,77 +6959,37 @@
                   <a:schemeClr val="bg1"/>
                 </a:solidFill>
               </a:rPr>
-              <a:t>When the oceans rise</a:t>
-            </a:r>
-          </a:p>
-          <a:p>
-            <a:r>
-              <a:rPr lang="en-GB" sz="3600" dirty="0">
-                <a:solidFill>
-                  <a:schemeClr val="bg1"/>
-                </a:solidFill>
-              </a:rPr>
-              <a:t>And thunders roar</a:t>
-            </a:r>
-          </a:p>
-          <a:p>
-            <a:r>
-              <a:rPr lang="en-GB" sz="3600" dirty="0">
-                <a:solidFill>
-                  <a:schemeClr val="bg1"/>
-                </a:solidFill>
-              </a:rPr>
-              <a:t>I will soar with You</a:t>
-            </a:r>
-          </a:p>
-          <a:p>
-            <a:r>
-              <a:rPr lang="en-GB" sz="3600" dirty="0">
-                <a:solidFill>
-                  <a:schemeClr val="bg1"/>
-                </a:solidFill>
-              </a:rPr>
-              <a:t>Above the storm</a:t>
-            </a:r>
-          </a:p>
-          <a:p>
-            <a:r>
-              <a:rPr lang="en-GB" sz="3600" dirty="0">
-                <a:solidFill>
-                  <a:schemeClr val="bg1"/>
-                </a:solidFill>
-              </a:rPr>
-              <a:t>Father You are King</a:t>
-            </a:r>
-          </a:p>
-          <a:p>
-            <a:r>
-              <a:rPr lang="en-GB" sz="3600" dirty="0">
-                <a:solidFill>
-                  <a:schemeClr val="bg1"/>
-                </a:solidFill>
-              </a:rPr>
-              <a:t>Over the flood</a:t>
-            </a:r>
-          </a:p>
-          <a:p>
-            <a:r>
-              <a:rPr lang="en-GB" sz="3600" dirty="0">
-                <a:solidFill>
-                  <a:schemeClr val="bg1"/>
-                </a:solidFill>
-              </a:rPr>
-              <a:t>I will be still and know</a:t>
-            </a:r>
-          </a:p>
-          <a:p>
-            <a:r>
-              <a:rPr lang="en-GB" sz="3600" dirty="0">
-                <a:solidFill>
-                  <a:schemeClr val="bg1"/>
-                </a:solidFill>
-              </a:rPr>
-              <a:t>You are God</a:t>
+              <a:t>Hide me now</a:t>
+            </a:r>
+          </a:p>
+          <a:p>
+            <a:r>
+              <a:rPr lang="en-GB" sz="3600" dirty="0">
+                <a:solidFill>
+                  <a:schemeClr val="bg1"/>
+                </a:solidFill>
+              </a:rPr>
+              <a:t>Under Your wings</a:t>
+            </a:r>
+          </a:p>
+          <a:p>
+            <a:r>
+              <a:rPr lang="en-GB" sz="3600" dirty="0">
+                <a:solidFill>
+                  <a:schemeClr val="bg1"/>
+                </a:solidFill>
+              </a:rPr>
+              <a:t>Cover me</a:t>
+            </a:r>
+          </a:p>
+          <a:p>
+            <a:r>
+              <a:rPr lang="en-GB" sz="3600" dirty="0">
+                <a:solidFill>
+                  <a:schemeClr val="bg1"/>
+                </a:solidFill>
+              </a:rPr>
+              <a:t>Within Your mighty hand</a:t>
             </a:r>
           </a:p>
         </p:txBody>
@@ -7118,7 +7022,7 @@
                   <a:schemeClr val="bg1"/>
                 </a:solidFill>
               </a:rPr>
-              <a:t>2/3</a:t>
+              <a:t>1/3</a:t>
             </a:r>
           </a:p>
         </p:txBody>
@@ -7126,7 +7030,7 @@
     </p:spTree>
     <p:extLst>
       <p:ext uri="{BB962C8B-B14F-4D97-AF65-F5344CB8AC3E}">
-        <p14:creationId xmlns:p14="http://schemas.microsoft.com/office/powerpoint/2010/main" val="145976460"/>
+        <p14:creationId xmlns:p14="http://schemas.microsoft.com/office/powerpoint/2010/main" val="3281651247"/>
       </p:ext>
     </p:extLst>
   </p:cSld>
@@ -7263,6 +7167,172 @@
 </file>
 
 <file path=ppt/slides/slide30.xml><?xml version="1.0" encoding="utf-8"?>
+<p:sld xmlns:a="http://schemas.openxmlformats.org/drawingml/2006/main" xmlns:r="http://schemas.openxmlformats.org/officeDocument/2006/relationships" xmlns:p="http://schemas.openxmlformats.org/presentationml/2006/main">
+  <p:cSld>
+    <p:spTree>
+      <p:nvGrpSpPr>
+        <p:cNvPr id="1" name=""/>
+        <p:cNvGrpSpPr/>
+        <p:nvPr/>
+      </p:nvGrpSpPr>
+      <p:grpSpPr>
+        <a:xfrm>
+          <a:off x="0" y="0"/>
+          <a:ext cx="0" cy="0"/>
+          <a:chOff x="0" y="0"/>
+          <a:chExt cx="0" cy="0"/>
+        </a:xfrm>
+      </p:grpSpPr>
+      <p:sp>
+        <p:nvSpPr>
+          <p:cNvPr id="3" name="Subtitle 2"/>
+          <p:cNvSpPr>
+            <a:spLocks noGrp="1"/>
+          </p:cNvSpPr>
+          <p:nvPr>
+            <p:ph type="subTitle" idx="1"/>
+          </p:nvPr>
+        </p:nvSpPr>
+        <p:spPr>
+          <a:xfrm>
+            <a:off x="203118" y="692696"/>
+            <a:ext cx="8640960" cy="6480720"/>
+          </a:xfrm>
+        </p:spPr>
+        <p:txBody>
+          <a:bodyPr>
+            <a:noAutofit/>
+          </a:bodyPr>
+          <a:lstStyle/>
+          <a:p>
+            <a:r>
+              <a:rPr lang="en-GB" sz="3600" dirty="0">
+                <a:solidFill>
+                  <a:schemeClr val="bg1"/>
+                </a:solidFill>
+              </a:rPr>
+              <a:t>When the oceans rise</a:t>
+            </a:r>
+          </a:p>
+          <a:p>
+            <a:r>
+              <a:rPr lang="en-GB" sz="3600" dirty="0">
+                <a:solidFill>
+                  <a:schemeClr val="bg1"/>
+                </a:solidFill>
+              </a:rPr>
+              <a:t>And thunders roar</a:t>
+            </a:r>
+          </a:p>
+          <a:p>
+            <a:r>
+              <a:rPr lang="en-GB" sz="3600" dirty="0">
+                <a:solidFill>
+                  <a:schemeClr val="bg1"/>
+                </a:solidFill>
+              </a:rPr>
+              <a:t>I will soar with You</a:t>
+            </a:r>
+          </a:p>
+          <a:p>
+            <a:r>
+              <a:rPr lang="en-GB" sz="3600" dirty="0">
+                <a:solidFill>
+                  <a:schemeClr val="bg1"/>
+                </a:solidFill>
+              </a:rPr>
+              <a:t>Above the storm</a:t>
+            </a:r>
+          </a:p>
+          <a:p>
+            <a:r>
+              <a:rPr lang="en-GB" sz="3600" dirty="0">
+                <a:solidFill>
+                  <a:schemeClr val="bg1"/>
+                </a:solidFill>
+              </a:rPr>
+              <a:t>Father You are King</a:t>
+            </a:r>
+          </a:p>
+          <a:p>
+            <a:r>
+              <a:rPr lang="en-GB" sz="3600" dirty="0">
+                <a:solidFill>
+                  <a:schemeClr val="bg1"/>
+                </a:solidFill>
+              </a:rPr>
+              <a:t>Over the flood</a:t>
+            </a:r>
+          </a:p>
+          <a:p>
+            <a:r>
+              <a:rPr lang="en-GB" sz="3600" dirty="0">
+                <a:solidFill>
+                  <a:schemeClr val="bg1"/>
+                </a:solidFill>
+              </a:rPr>
+              <a:t>I will be still and know</a:t>
+            </a:r>
+          </a:p>
+          <a:p>
+            <a:r>
+              <a:rPr lang="en-GB" sz="3600" dirty="0">
+                <a:solidFill>
+                  <a:schemeClr val="bg1"/>
+                </a:solidFill>
+              </a:rPr>
+              <a:t>You are God</a:t>
+            </a:r>
+          </a:p>
+        </p:txBody>
+      </p:sp>
+      <p:sp>
+        <p:nvSpPr>
+          <p:cNvPr id="4" name="TextBox 3"/>
+          <p:cNvSpPr txBox="1"/>
+          <p:nvPr/>
+        </p:nvSpPr>
+        <p:spPr>
+          <a:xfrm>
+            <a:off x="8529729" y="0"/>
+            <a:ext cx="628698" cy="461665"/>
+          </a:xfrm>
+          <a:prstGeom prst="rect">
+            <a:avLst/>
+          </a:prstGeom>
+          <a:noFill/>
+        </p:spPr>
+        <p:txBody>
+          <a:bodyPr wrap="none" rtlCol="0">
+            <a:spAutoFit/>
+          </a:bodyPr>
+          <a:lstStyle/>
+          <a:p>
+            <a:r>
+              <a:rPr lang="en-GB" sz="2400" b="1" dirty="0">
+                <a:solidFill>
+                  <a:schemeClr val="bg1"/>
+                </a:solidFill>
+              </a:rPr>
+              <a:t>2/3</a:t>
+            </a:r>
+          </a:p>
+        </p:txBody>
+      </p:sp>
+    </p:spTree>
+    <p:extLst>
+      <p:ext uri="{BB962C8B-B14F-4D97-AF65-F5344CB8AC3E}">
+        <p14:creationId xmlns:p14="http://schemas.microsoft.com/office/powerpoint/2010/main" val="145976460"/>
+      </p:ext>
+    </p:extLst>
+  </p:cSld>
+  <p:clrMapOvr>
+    <a:masterClrMapping/>
+  </p:clrMapOvr>
+</p:sld>
+</file>
+
+<file path=ppt/slides/slide31.xml><?xml version="1.0" encoding="utf-8"?>
 <p:sld xmlns:a="http://schemas.openxmlformats.org/drawingml/2006/main" xmlns:r="http://schemas.openxmlformats.org/officeDocument/2006/relationships" xmlns:p="http://schemas.openxmlformats.org/presentationml/2006/main">
   <p:cSld>
     <p:spTree>
